--- a/4 - MidTerm_Presentation/Group_23.pptx
+++ b/4 - MidTerm_Presentation/Group_23.pptx
@@ -207,7 +207,7 @@
           <a:p>
             <a:fld id="{EA8FC050-9C1D-4A44-B4C3-0E30B77BCAC1}" type="datetimeFigureOut">
               <a:rPr lang="it-IT" smtClean="0"/>
-              <a:t>16/04/2026</a:t>
+              <a:t>23/06/2026</a:t>
             </a:fld>
             <a:endParaRPr lang="it-IT"/>
           </a:p>
